--- a/curso/pptx/S34.pptx
+++ b/curso/pptx/S34.pptx
@@ -7120,7 +7120,7 @@
                 </a:solidFill>
                 <a:latin typeface="Nunito Sans"/>
               </a:rPr>
-              <a:t>No hace falta ser experto: hay </a:t>
+              <a:t>不需要是专家：有简单的</a:t>
             </a:r>
             <a:r>
               <a:rPr sz="2800" b="1">
@@ -7129,7 +7129,23 @@
                 </a:solidFill>
                 <a:latin typeface="Nunito Sans"/>
               </a:rPr>
-              <a:t>pasos</a:t>
+              <a:t>步骤</a:t>
+            </a:r>
+          </a:p>
+          <a:p>
+            <a:pPr>
+              <a:spcAft>
+                <a:spcPts val="1260"/>
+              </a:spcAft>
+            </a:pPr>
+            <a:r>
+              <a:rPr sz="2800" b="1">
+                <a:solidFill>
+                  <a:srgbClr val="E8793A"/>
+                </a:solidFill>
+                <a:latin typeface="Nunito Sans"/>
+              </a:rPr>
+              <a:t>• </a:t>
             </a:r>
             <a:r>
               <a:rPr sz="2800" b="0">
@@ -7138,7 +7154,7 @@
                 </a:solidFill>
                 <a:latin typeface="Nunito Sans"/>
               </a:rPr>
-              <a:t> sencillos</a:t>
+              <a:t>第1步：横向阅读</a:t>
             </a:r>
           </a:p>
           <a:p>
@@ -7163,32 +7179,7 @@
                 </a:solidFill>
                 <a:latin typeface="Nunito Sans"/>
               </a:rPr>
-              <a:t>Paso 1: lectura lateral</a:t>
-            </a:r>
-          </a:p>
-          <a:p>
-            <a:pPr>
-              <a:spcAft>
-                <a:spcPts val="1260"/>
-              </a:spcAft>
-            </a:pPr>
-            <a:r>
-              <a:rPr sz="2800" b="1">
-                <a:solidFill>
-                  <a:srgbClr val="E8793A"/>
-                </a:solidFill>
-                <a:latin typeface="Nunito Sans"/>
-              </a:rPr>
-              <a:t>• </a:t>
-            </a:r>
-            <a:r>
-              <a:rPr sz="2800" b="0">
-                <a:solidFill>
-                  <a:srgbClr val="1F2A44"/>
-                </a:solidFill>
-                <a:latin typeface="Nunito Sans"/>
-              </a:rPr>
-              <a:t>Paso 2: la fecha. Paso 3: el origen de la imagen</a:t>
+              <a:t>第2步：日期。第3步：图片的来源</a:t>
             </a:r>
           </a:p>
         </p:txBody>
@@ -7422,7 +7413,7 @@
                 </a:solidFill>
                 <a:latin typeface="Nunito Sans"/>
               </a:rPr>
-              <a:t>Abre </a:t>
+              <a:t>打开</a:t>
             </a:r>
             <a:r>
               <a:rPr sz="2800" b="1">
@@ -7431,7 +7422,7 @@
                 </a:solidFill>
                 <a:latin typeface="Nunito Sans"/>
               </a:rPr>
-              <a:t>otras pestañas</a:t>
+              <a:t>其他标签页</a:t>
             </a:r>
             <a:r>
               <a:rPr sz="2800" b="0">
@@ -7440,7 +7431,7 @@
                 </a:solidFill>
                 <a:latin typeface="Nunito Sans"/>
               </a:rPr>
-              <a:t>: busca el nombre de la web o del autor</a:t>
+              <a:t>：搜索这个网站或者作者的名字</a:t>
             </a:r>
           </a:p>
           <a:p>
@@ -7465,7 +7456,7 @@
                 </a:solidFill>
                 <a:latin typeface="Nunito Sans"/>
               </a:rPr>
-              <a:t>¿Qué dicen de ella medios serios o verificadores?</a:t>
+              <a:t>严肃的媒体或者核查机构怎么说它？</a:t>
             </a:r>
           </a:p>
           <a:p>
@@ -7490,7 +7481,7 @@
                 </a:solidFill>
                 <a:latin typeface="Nunito Sans"/>
               </a:rPr>
-              <a:t>¿Otras fuentes serias cuentan lo mismo?</a:t>
+              <a:t>其他严肃的来源也说同样的事吗？</a:t>
             </a:r>
           </a:p>
           <a:p>
@@ -7515,7 +7506,7 @@
                 </a:solidFill>
                 <a:latin typeface="Nunito Sans"/>
               </a:rPr>
-              <a:t>Así trabajan los verificadores profesionales</a:t>
+              <a:t>专业的核查人员就是这样工作的</a:t>
             </a:r>
           </a:p>
         </p:txBody>
@@ -7749,7 +7740,7 @@
                 </a:solidFill>
                 <a:latin typeface="Nunito Sans"/>
               </a:rPr>
-              <a:t>Me fío por el diseño bonito</a:t>
+              <a:t>我因为设计好看就相信</a:t>
             </a:r>
           </a:p>
           <a:p>
@@ -7774,7 +7765,7 @@
                 </a:solidFill>
                 <a:latin typeface="Nunito Sans"/>
               </a:rPr>
-              <a:t>Leo el «Quiénes somos» de la propia web</a:t>
+              <a:t>我读这个网站自己的“关于我们”</a:t>
             </a:r>
           </a:p>
           <a:p>
@@ -7799,7 +7790,7 @@
                 </a:solidFill>
                 <a:latin typeface="Nunito Sans"/>
               </a:rPr>
-              <a:t>Solo miro lo que la página quiere que vea</a:t>
+              <a:t>我只看页面想让我看的东西</a:t>
             </a:r>
           </a:p>
         </p:txBody>
@@ -7929,7 +7920,7 @@
                 </a:solidFill>
                 <a:latin typeface="Nunito Sans"/>
               </a:rPr>
-              <a:t>Busco qué dicen otros de esa web</a:t>
+              <a:t>我查别人怎么说这个网站</a:t>
             </a:r>
           </a:p>
           <a:p>
@@ -7954,7 +7945,7 @@
                 </a:solidFill>
                 <a:latin typeface="Nunito Sans"/>
               </a:rPr>
-              <a:t>Compruebo si otras fuentes cuentan lo mismo</a:t>
+              <a:t>我核对其他来源是不是说同样的事</a:t>
             </a:r>
           </a:p>
           <a:p>
@@ -7979,7 +7970,7 @@
                 </a:solidFill>
                 <a:latin typeface="Nunito Sans"/>
               </a:rPr>
-              <a:t>En dos minutos sé mucho más</a:t>
+              <a:t>两分钟，我就知道得多得多</a:t>
             </a:r>
           </a:p>
         </p:txBody>
@@ -8140,7 +8131,7 @@
                 </a:solidFill>
                 <a:latin typeface="Nunito Sans"/>
               </a:rPr>
-              <a:t> una noticia vieja compartida hoy parece nueva</a:t>
+              <a:t>一条旧新闻今天被转发，看起来像新的</a:t>
             </a:r>
           </a:p>
           <a:p>
@@ -8165,7 +8156,7 @@
                 </a:solidFill>
                 <a:latin typeface="Nunito Sans"/>
               </a:rPr>
-              <a:t>Mira cuándo se publicó, no cuándo te llegó</a:t>
+              <a:t>看它是什么时候发布的，不是你什么时候收到的</a:t>
             </a:r>
           </a:p>
           <a:p>
@@ -8190,7 +8181,7 @@
                 </a:solidFill>
                 <a:latin typeface="Nunito Sans"/>
               </a:rPr>
-              <a:t>Imagen:</a:t>
+              <a:t>图片：</a:t>
             </a:r>
             <a:r>
               <a:rPr sz="2800" b="0">
@@ -8199,7 +8190,7 @@
                 </a:solidFill>
                 <a:latin typeface="Nunito Sans"/>
               </a:rPr>
-              <a:t> haz una </a:t>
+              <a:t>做一次</a:t>
             </a:r>
             <a:r>
               <a:rPr sz="2800" b="1">
@@ -8208,7 +8199,7 @@
                 </a:solidFill>
                 <a:latin typeface="Nunito Sans"/>
               </a:rPr>
-              <a:t>búsqueda inversa</a:t>
+              <a:t>反向搜索</a:t>
             </a:r>
             <a:r>
               <a:rPr sz="2800" b="0">
@@ -8217,7 +8208,7 @@
                 </a:solidFill>
                 <a:latin typeface="Nunito Sans"/>
               </a:rPr>
-              <a:t> (por ejemplo, con Google Lens)</a:t>
+              <a:t>（例如用 Google Lens）</a:t>
             </a:r>
           </a:p>
           <a:p>
@@ -8242,7 +8233,7 @@
                 </a:solidFill>
                 <a:latin typeface="Nunito Sans"/>
               </a:rPr>
-              <a:t>Puede enseñarte dónde apareció antes esa foto (no siempre la encuentra)</a:t>
+              <a:t>它可以告诉你这张照片以前出现在哪里（不一定总能找到）</a:t>
             </a:r>
           </a:p>
         </p:txBody>

--- a/curso/pptx/S34.pptx
+++ b/curso/pptx/S34.pptx
@@ -4542,7 +4542,7 @@
                 </a:solidFill>
                 <a:latin typeface="Nunito Sans"/>
               </a:rPr>
-              <a:t>Dylan 收到：“比斯开省因为下雪停课！”下了一点雪，看起来像是真的。</a:t>
+              <a:t>一个男孩收到：“比斯开省因为下雪停课！”下了一点雪，看起来像是真的。</a:t>
             </a:r>
           </a:p>
         </p:txBody>
@@ -5160,7 +5160,7 @@
                 </a:solidFill>
                 <a:latin typeface="Nunito Sans"/>
               </a:rPr>
-              <a:t>Chen 对一张毕尔巴鄂游行的照片做了反向搜索。在别的任何地方都没有出现。“那它就是真的，而且是今天的。”他想。</a:t>
+              <a:t>一个男孩对一张毕尔巴鄂游行的照片做了反向搜索。在别的任何地方都没有出现。“那它就是真的，而且是今天的。”他想。</a:t>
             </a:r>
           </a:p>
         </p:txBody>
